--- a/11а клас/РС/4. Преработка и постепенни-промени/05. Използване на величини и изрази.pptx
+++ b/11а клас/РС/4. Преработка и постепенни-промени/05. Използване на величини и изрази.pptx
@@ -1757,7 +1757,35 @@
           <a:bodyPr/>
           <a:lstStyle/>
           <a:p>
+            <a:r>
+              <a:rPr sz="1300"/>
+              <a:t>ПРЕГЛЕД НА СЪДЪРЖАНИЕТО (1 мин.)</a:t>
+            </a:r>
             <a:endParaRPr lang="bg-BG"/>
+          </a:p>
+          <a:p>
+            <a:r>
+              <a:rPr sz="1300"/>
+              <a:t>Посочете накратко структурата:</a:t>
+            </a:r>
+          </a:p>
+          <a:p>
+            <a:r>
+              <a:rPr sz="1300"/>
+              <a:t>  "Ще минем от инициализация -&gt; обхват -&gt; именуване -&gt; изрази -&gt; константи."</a:t>
+            </a:r>
+          </a:p>
+          <a:p>
+            <a:r>
+              <a:rPr sz="1300"/>
+              <a:t>Акцент: "Всяка тема изглежда проста, но всяка има клопки."</a:t>
+            </a:r>
+          </a:p>
+          <a:p>
+            <a:r>
+              <a:rPr sz="1300"/>
+              <a:t>Не четете точките - просто ги посочете с ръка.</a:t>
+            </a:r>
           </a:p>
         </p:txBody>
       </p:sp>
@@ -1842,6 +1870,2395 @@
         <p14:creationId xmlns:p14="http://schemas.microsoft.com/office/powerpoint/2010/main" val="4272781246"/>
       </p:ext>
     </p:extLst>
+  </p:cSld>
+  <p:clrMapOvr>
+    <a:masterClrMapping/>
+  </p:clrMapOvr>
+</p:notes>
+</file>
+
+<file path=ppt/notesSlides/notesSlide10.xml><?xml version="1.0" encoding="utf-8"?>
+<p:notes xmlns:a="http://schemas.openxmlformats.org/drawingml/2006/main" xmlns:p="http://schemas.openxmlformats.org/presentationml/2006/main" xmlns:r="http://schemas.openxmlformats.org/officeDocument/2006/relationships">
+  <p:cSld>
+    <p:spTree>
+      <p:nvGrpSpPr>
+        <p:cNvPr id="1" name=""/>
+        <p:cNvGrpSpPr/>
+        <p:nvPr/>
+      </p:nvGrpSpPr>
+      <p:grpSpPr>
+        <a:xfrm>
+          <a:off x="0" y="0"/>
+          <a:ext cx="0" cy="0"/>
+          <a:chOff x="0" y="0"/>
+          <a:chExt cx="0" cy="0"/>
+        </a:xfrm>
+      </p:grpSpPr>
+      <p:sp>
+        <p:nvSpPr>
+          <p:cNvPr id="2" name="Slide Image Placeholder 1"/>
+          <p:cNvSpPr>
+            <a:spLocks noGrp="1"/>
+          </p:cNvSpPr>
+          <p:nvPr>
+            <p:ph type="sldImg" idx="2"/>
+          </p:nvPr>
+        </p:nvSpPr>
+        <p:spPr/>
+      </p:sp>
+      <p:sp>
+        <p:nvSpPr>
+          <p:cNvPr id="3" name="Notes Placeholder 2"/>
+          <p:cNvSpPr>
+            <a:spLocks noGrp="1"/>
+          </p:cNvSpPr>
+          <p:nvPr>
+            <p:ph type="body" idx="3" sz="quarter"/>
+          </p:nvPr>
+        </p:nvSpPr>
+        <p:spPr/>
+        <p:txBody>
+          <a:bodyPr/>
+          <a:lstStyle/>
+          <a:p>
+            <a:r>
+              <a:rPr sz="1300"/>
+              <a:t>ПРИМЕР ЗА НАДХВЪРЛЕН ОБХВАТ (3 мин.)</a:t>
+            </a:r>
+          </a:p>
+          <a:p>
+            <a:r>
+              <a:rPr sz="1300"/>
+              <a:t>Покажете класа Globals с глобален state.</a:t>
+            </a:r>
+          </a:p>
+          <a:p>
+            <a:r>
+              <a:rPr sz="1300"/>
+              <a:t>Задайте: "Какъв е проблемът с глобалните променливи?"</a:t>
+            </a:r>
+          </a:p>
+          <a:p>
+            <a:r>
+              <a:rPr sz="1300"/>
+              <a:t>Очаквани отговори: трудно следене кой ги промени, проблеми с нишки, трудно тестване.</a:t>
+            </a:r>
+          </a:p>
+          <a:p>
+            <a:r>
+              <a:rPr sz="1300"/>
+              <a:t>Обяснете: "ConsolePrinter зависи от Globals - скрита зависимост. Не се вижда от сигнатурата."</a:t>
+            </a:r>
+          </a:p>
+          <a:p>
+            <a:r>
+              <a:rPr sz="1300"/>
+              <a:t>Акцент: "Скритите зависимости са по-опасни от явните - не се виждат при code review."</a:t>
+            </a:r>
+          </a:p>
+        </p:txBody>
+      </p:sp>
+      <p:sp>
+        <p:nvSpPr>
+          <p:cNvPr id="4" name="Slide Number Placeholder 3"/>
+          <p:cNvSpPr>
+            <a:spLocks noGrp="1"/>
+          </p:cNvSpPr>
+          <p:nvPr>
+            <p:ph type="sldNum" idx="5" sz="quarter"/>
+          </p:nvPr>
+        </p:nvSpPr>
+        <p:spPr/>
+      </p:sp>
+    </p:spTree>
+  </p:cSld>
+  <p:clrMapOvr>
+    <a:masterClrMapping/>
+  </p:clrMapOvr>
+</p:notes>
+</file>
+
+<file path=ppt/notesSlides/notesSlide11.xml><?xml version="1.0" encoding="utf-8"?>
+<p:notes xmlns:a="http://schemas.openxmlformats.org/drawingml/2006/main" xmlns:p="http://schemas.openxmlformats.org/presentationml/2006/main" xmlns:r="http://schemas.openxmlformats.org/officeDocument/2006/relationships">
+  <p:cSld>
+    <p:spTree>
+      <p:nvGrpSpPr>
+        <p:cNvPr id="1" name=""/>
+        <p:cNvGrpSpPr/>
+        <p:nvPr/>
+      </p:nvGrpSpPr>
+      <p:grpSpPr>
+        <a:xfrm>
+          <a:off x="0" y="0"/>
+          <a:ext cx="0" cy="0"/>
+          <a:chOff x="0" y="0"/>
+          <a:chExt cx="0" cy="0"/>
+        </a:xfrm>
+      </p:grpSpPr>
+      <p:sp>
+        <p:nvSpPr>
+          <p:cNvPr id="2" name="Slide Image Placeholder 1"/>
+          <p:cNvSpPr>
+            <a:spLocks noGrp="1"/>
+          </p:cNvSpPr>
+          <p:nvPr>
+            <p:ph type="sldImg" idx="2"/>
+          </p:nvPr>
+        </p:nvSpPr>
+        <p:spPr/>
+      </p:sp>
+      <p:sp>
+        <p:nvSpPr>
+          <p:cNvPr id="3" name="Notes Placeholder 2"/>
+          <p:cNvSpPr>
+            <a:spLocks noGrp="1"/>
+          </p:cNvSpPr>
+          <p:nvPr>
+            <p:ph type="body" idx="3" sz="quarter"/>
+          </p:nvPr>
+        </p:nvSpPr>
+        <p:spPr/>
+        <p:txBody>
+          <a:bodyPr/>
+          <a:lstStyle/>
+          <a:p>
+            <a:r>
+              <a:rPr sz="1300"/>
+              <a:t>НАЙ-ДОБРИ ПРАКТИКИ ПРИ ПРОМЕНЛИВИТЕ (3 мин.)</a:t>
+            </a:r>
+          </a:p>
+          <a:p>
+            <a:r>
+              <a:rPr sz="1300"/>
+              <a:t>Акцентирайте на:</a:t>
+            </a:r>
+          </a:p>
+          <a:p>
+            <a:r>
+              <a:rPr sz="1300"/>
+              <a:t>  1. "Инициализирайте преди цикъла" - вече го знаем.</a:t>
+            </a:r>
+          </a:p>
+          <a:p>
+            <a:r>
+              <a:rPr sz="1300"/>
+              <a:t>  2. "Не следвайте стария C стил: int i, j, k; в началото на метода." -&gt; Защо? Далеч от употребата.</a:t>
+            </a:r>
+          </a:p>
+          <a:p>
+            <a:r>
+              <a:rPr sz="1300"/>
+              <a:t>  3. "Започнете с най-ограничената видимост." -&gt; Default: private. Разширявайте само при нужда.</a:t>
+            </a:r>
+          </a:p>
+          <a:p>
+            <a:r>
+              <a:rPr sz="1300"/>
+              <a:t>  4. "Групирайте свързани изрази." -&gt; Преход към следващия слайд.</a:t>
+            </a:r>
+          </a:p>
+          <a:p>
+            <a:r>
+              <a:rPr sz="1300"/>
+              <a:t>Задайте: "В кой езиков стил декларирате всички променливи в началото на метода?" -&gt; C, Pascal, стар C#.</a:t>
+            </a:r>
+          </a:p>
+        </p:txBody>
+      </p:sp>
+      <p:sp>
+        <p:nvSpPr>
+          <p:cNvPr id="4" name="Slide Number Placeholder 3"/>
+          <p:cNvSpPr>
+            <a:spLocks noGrp="1"/>
+          </p:cNvSpPr>
+          <p:nvPr>
+            <p:ph type="sldNum" idx="5" sz="quarter"/>
+          </p:nvPr>
+        </p:nvSpPr>
+        <p:spPr/>
+      </p:sp>
+    </p:spTree>
+  </p:cSld>
+  <p:clrMapOvr>
+    <a:masterClrMapping/>
+  </p:clrMapOvr>
+</p:notes>
+</file>
+
+<file path=ppt/notesSlides/notesSlide12.xml><?xml version="1.0" encoding="utf-8"?>
+<p:notes xmlns:a="http://schemas.openxmlformats.org/drawingml/2006/main" xmlns:p="http://schemas.openxmlformats.org/presentationml/2006/main" xmlns:r="http://schemas.openxmlformats.org/officeDocument/2006/relationships">
+  <p:cSld>
+    <p:spTree>
+      <p:nvGrpSpPr>
+        <p:cNvPr id="1" name=""/>
+        <p:cNvGrpSpPr/>
+        <p:nvPr/>
+      </p:nvGrpSpPr>
+      <p:grpSpPr>
+        <a:xfrm>
+          <a:off x="0" y="0"/>
+          <a:ext cx="0" cy="0"/>
+          <a:chOff x="0" y="0"/>
+          <a:chExt cx="0" cy="0"/>
+        </a:xfrm>
+      </p:grpSpPr>
+      <p:sp>
+        <p:nvSpPr>
+          <p:cNvPr id="2" name="Slide Image Placeholder 1"/>
+          <p:cNvSpPr>
+            <a:spLocks noGrp="1"/>
+          </p:cNvSpPr>
+          <p:nvPr>
+            <p:ph type="sldImg" idx="2"/>
+          </p:nvPr>
+        </p:nvSpPr>
+        <p:spPr/>
+      </p:sp>
+      <p:sp>
+        <p:nvSpPr>
+          <p:cNvPr id="3" name="Notes Placeholder 2"/>
+          <p:cNvSpPr>
+            <a:spLocks noGrp="1"/>
+          </p:cNvSpPr>
+          <p:nvPr>
+            <p:ph type="body" idx="3" sz="quarter"/>
+          </p:nvPr>
+        </p:nvSpPr>
+        <p:spPr/>
+        <p:txBody>
+          <a:bodyPr/>
+          <a:lstStyle/>
+          <a:p>
+            <a:r>
+              <a:rPr sz="1300"/>
+              <a:t>ПРИМЕР ЗА ПРЕКАЛЕНО МНОГО ПРОМЕНЛИВИ (3 мин.)</a:t>
+            </a:r>
+          </a:p>
+          <a:p>
+            <a:r>
+              <a:rPr sz="1300"/>
+              <a:t>Покажете SummarizeData с 6 променливи.</a:t>
+            </a:r>
+          </a:p>
+          <a:p>
+            <a:r>
+              <a:rPr sz="1300"/>
+              <a:t>Задайте: "Колко информация трябва да пазите в главата си, за да разберете метода?"</a:t>
+            </a:r>
+          </a:p>
+          <a:p>
+            <a:r>
+              <a:rPr sz="1300"/>
+              <a:t>Отговор: 6 стойности едновременно - трудно.</a:t>
+            </a:r>
+          </a:p>
+          <a:p>
+            <a:r>
+              <a:rPr sz="1300"/>
+              <a:t>Обяснете: "Когато методът работи с твърде много данни едновременно, той прави твърде много неща."</a:t>
+            </a:r>
+          </a:p>
+          <a:p>
+            <a:r>
+              <a:rPr sz="1300"/>
+              <a:t>Преход: "Нека видим как изглежда по-добро решение."</a:t>
+            </a:r>
+          </a:p>
+        </p:txBody>
+      </p:sp>
+      <p:sp>
+        <p:nvSpPr>
+          <p:cNvPr id="4" name="Slide Number Placeholder 3"/>
+          <p:cNvSpPr>
+            <a:spLocks noGrp="1"/>
+          </p:cNvSpPr>
+          <p:nvPr>
+            <p:ph type="sldNum" idx="5" sz="quarter"/>
+          </p:nvPr>
+        </p:nvSpPr>
+        <p:spPr/>
+      </p:sp>
+    </p:spTree>
+  </p:cSld>
+  <p:clrMapOvr>
+    <a:masterClrMapping/>
+  </p:clrMapOvr>
+</p:notes>
+</file>
+
+<file path=ppt/notesSlides/notesSlide13.xml><?xml version="1.0" encoding="utf-8"?>
+<p:notes xmlns:a="http://schemas.openxmlformats.org/drawingml/2006/main" xmlns:p="http://schemas.openxmlformats.org/presentationml/2006/main" xmlns:r="http://schemas.openxmlformats.org/officeDocument/2006/relationships">
+  <p:cSld>
+    <p:spTree>
+      <p:nvGrpSpPr>
+        <p:cNvPr id="1" name=""/>
+        <p:cNvGrpSpPr/>
+        <p:nvPr/>
+      </p:nvGrpSpPr>
+      <p:grpSpPr>
+        <a:xfrm>
+          <a:off x="0" y="0"/>
+          <a:ext cx="0" cy="0"/>
+          <a:chOff x="0" y="0"/>
+          <a:chExt cx="0" cy="0"/>
+        </a:xfrm>
+      </p:grpSpPr>
+      <p:sp>
+        <p:nvSpPr>
+          <p:cNvPr id="2" name="Slide Image Placeholder 1"/>
+          <p:cNvSpPr>
+            <a:spLocks noGrp="1"/>
+          </p:cNvSpPr>
+          <p:nvPr>
+            <p:ph type="sldImg" idx="2"/>
+          </p:nvPr>
+        </p:nvSpPr>
+        <p:spPr/>
+      </p:sp>
+      <p:sp>
+        <p:nvSpPr>
+          <p:cNvPr id="3" name="Notes Placeholder 2"/>
+          <p:cNvSpPr>
+            <a:spLocks noGrp="1"/>
+          </p:cNvSpPr>
+          <p:nvPr>
+            <p:ph type="body" idx="3" sz="quarter"/>
+          </p:nvPr>
+        </p:nvSpPr>
+        <p:spPr/>
+        <p:txBody>
+          <a:bodyPr/>
+          <a:lstStyle/>
+          <a:p>
+            <a:r>
+              <a:rPr sz="1300"/>
+              <a:t>ПРИМЕР ЗА ПО-ДОБРО ГРУПИРАНЕ (3 мин.)</a:t>
+            </a:r>
+          </a:p>
+          <a:p>
+            <a:r>
+              <a:rPr sz="1300"/>
+              <a:t>Покажете рефакторирания SummarizeDaily.</a:t>
+            </a:r>
+          </a:p>
+          <a:p>
+            <a:r>
+              <a:rPr sz="1300"/>
+              <a:t>Задайте: "Каква е разликата? Защо е по-добре?"</a:t>
+            </a:r>
+          </a:p>
+          <a:p>
+            <a:r>
+              <a:rPr sz="1300"/>
+              <a:t>Отговор:</a:t>
+            </a:r>
+          </a:p>
+          <a:p>
+            <a:r>
+              <a:rPr sz="1300"/>
+              <a:t>  - Разделено на два блока - стари данни и нови данни.</a:t>
+            </a:r>
+          </a:p>
+          <a:p>
+            <a:r>
+              <a:rPr sz="1300"/>
+              <a:t>  - Всеки блок е по-кратък и работи с по-малко едновременни данни.</a:t>
+            </a:r>
+          </a:p>
+          <a:p>
+            <a:r>
+              <a:rPr sz="1300"/>
+              <a:t>Акцент: "Метод, в чийто код може да поставите хоризонтална линия - може да се раздели на части."</a:t>
+            </a:r>
+          </a:p>
+          <a:p>
+            <a:r>
+              <a:rPr sz="1300"/>
+              <a:t>Свързване: "Това ще видите като Extract Method при рефакторирането."</a:t>
+            </a:r>
+          </a:p>
+        </p:txBody>
+      </p:sp>
+      <p:sp>
+        <p:nvSpPr>
+          <p:cNvPr id="4" name="Slide Number Placeholder 3"/>
+          <p:cNvSpPr>
+            <a:spLocks noGrp="1"/>
+          </p:cNvSpPr>
+          <p:nvPr>
+            <p:ph type="sldNum" idx="5" sz="quarter"/>
+          </p:nvPr>
+        </p:nvSpPr>
+        <p:spPr/>
+      </p:sp>
+    </p:spTree>
+  </p:cSld>
+  <p:clrMapOvr>
+    <a:masterClrMapping/>
+  </p:clrMapOvr>
+</p:notes>
+</file>
+
+<file path=ppt/notesSlides/notesSlide14.xml><?xml version="1.0" encoding="utf-8"?>
+<p:notes xmlns:a="http://schemas.openxmlformats.org/drawingml/2006/main" xmlns:p="http://schemas.openxmlformats.org/presentationml/2006/main" xmlns:r="http://schemas.openxmlformats.org/officeDocument/2006/relationships">
+  <p:cSld>
+    <p:spTree>
+      <p:nvGrpSpPr>
+        <p:cNvPr id="1" name=""/>
+        <p:cNvGrpSpPr/>
+        <p:nvPr/>
+      </p:nvGrpSpPr>
+      <p:grpSpPr>
+        <a:xfrm>
+          <a:off x="0" y="0"/>
+          <a:ext cx="0" cy="0"/>
+          <a:chOff x="0" y="0"/>
+          <a:chExt cx="0" cy="0"/>
+        </a:xfrm>
+      </p:grpSpPr>
+      <p:sp>
+        <p:nvSpPr>
+          <p:cNvPr id="2" name="Slide Image Placeholder 1"/>
+          <p:cNvSpPr>
+            <a:spLocks noGrp="1"/>
+          </p:cNvSpPr>
+          <p:nvPr>
+            <p:ph type="sldImg" idx="2"/>
+          </p:nvPr>
+        </p:nvSpPr>
+        <p:spPr/>
+      </p:sp>
+      <p:sp>
+        <p:nvSpPr>
+          <p:cNvPr id="3" name="Notes Placeholder 2"/>
+          <p:cNvSpPr>
+            <a:spLocks noGrp="1"/>
+          </p:cNvSpPr>
+          <p:nvPr>
+            <p:ph type="body" idx="3" sz="quarter"/>
+          </p:nvPr>
+        </p:nvSpPr>
+        <p:spPr/>
+        <p:txBody>
+          <a:bodyPr/>
+          <a:lstStyle/>
+          <a:p>
+            <a:r>
+              <a:rPr sz="1300"/>
+              <a:t>ЕДИНСТВЕНА ЦЕЛ НА ПРОМЕНЛИВАТА (3 мин.)</a:t>
+            </a:r>
+          </a:p>
+          <a:p>
+            <a:r>
+              <a:rPr sz="1300"/>
+              <a:t>Прочетете правилото: "Никога не ползвайте една променлива за много цели!"</a:t>
+            </a:r>
+          </a:p>
+          <a:p>
+            <a:r>
+              <a:rPr sz="1300"/>
+              <a:t>Покажете примера: studentsCountOrAvgGrade - ужасяващо название.</a:t>
+            </a:r>
+          </a:p>
+          <a:p>
+            <a:r>
+              <a:rPr sz="1300"/>
+              <a:t>Задайте: "Какъв е проблемът при повторно използване на променлива за различна цел?"</a:t>
+            </a:r>
+          </a:p>
+          <a:p>
+            <a:r>
+              <a:rPr sz="1300"/>
+              <a:t>Отговор: объркване, трудно дебъгване, може да забравите да нулирате.</a:t>
+            </a:r>
+          </a:p>
+          <a:p>
+            <a:r>
+              <a:rPr sz="1300"/>
+              <a:t>Акцент: "Паметта е евтина. Четимостта е скъпа. Никога не пестете на имена на променливи."</a:t>
+            </a:r>
+          </a:p>
+        </p:txBody>
+      </p:sp>
+      <p:sp>
+        <p:nvSpPr>
+          <p:cNvPr id="4" name="Slide Number Placeholder 3"/>
+          <p:cNvSpPr>
+            <a:spLocks noGrp="1"/>
+          </p:cNvSpPr>
+          <p:nvPr>
+            <p:ph type="sldNum" idx="5" sz="quarter"/>
+          </p:nvPr>
+        </p:nvSpPr>
+        <p:spPr/>
+      </p:sp>
+    </p:spTree>
+  </p:cSld>
+  <p:clrMapOvr>
+    <a:masterClrMapping/>
+  </p:clrMapOvr>
+</p:notes>
+</file>
+
+<file path=ppt/notesSlides/notesSlide15.xml><?xml version="1.0" encoding="utf-8"?>
+<p:notes xmlns:a="http://schemas.openxmlformats.org/drawingml/2006/main" xmlns:p="http://schemas.openxmlformats.org/presentationml/2006/main" xmlns:r="http://schemas.openxmlformats.org/officeDocument/2006/relationships">
+  <p:cSld>
+    <p:spTree>
+      <p:nvGrpSpPr>
+        <p:cNvPr id="1" name=""/>
+        <p:cNvGrpSpPr/>
+        <p:nvPr/>
+      </p:nvGrpSpPr>
+      <p:grpSpPr>
+        <a:xfrm>
+          <a:off x="0" y="0"/>
+          <a:ext cx="0" cy="0"/>
+          <a:chOff x="0" y="0"/>
+          <a:chExt cx="0" cy="0"/>
+        </a:xfrm>
+      </p:grpSpPr>
+      <p:sp>
+        <p:nvSpPr>
+          <p:cNvPr id="2" name="Slide Image Placeholder 1"/>
+          <p:cNvSpPr>
+            <a:spLocks noGrp="1"/>
+          </p:cNvSpPr>
+          <p:nvPr>
+            <p:ph type="sldImg" idx="2"/>
+          </p:nvPr>
+        </p:nvSpPr>
+        <p:spPr/>
+      </p:sp>
+      <p:sp>
+        <p:nvSpPr>
+          <p:cNvPr id="3" name="Notes Placeholder 2"/>
+          <p:cNvSpPr>
+            <a:spLocks noGrp="1"/>
+          </p:cNvSpPr>
+          <p:nvPr>
+            <p:ph type="body" idx="3" sz="quarter"/>
+          </p:nvPr>
+        </p:nvSpPr>
+        <p:spPr/>
+        <p:txBody>
+          <a:bodyPr/>
+          <a:lstStyle/>
+          <a:p>
+            <a:r>
+              <a:rPr sz="1300"/>
+              <a:t>ИЗБЯГВАЙТЕ СЛОЖНИ ИЗРАЗИ (3 мин.)</a:t>
+            </a:r>
+          </a:p>
+          <a:p>
+            <a:r>
+              <a:rPr sz="1300"/>
+              <a:t>Покажете матричния пример. Задайте: "Колко потенциални грешки виждате?"</a:t>
+            </a:r>
+          </a:p>
+          <a:p>
+            <a:r>
+              <a:rPr sz="1300"/>
+              <a:t>Отговор от слайда: "10 потенциални IndexOutOfRangeException."</a:t>
+            </a:r>
+          </a:p>
+          <a:p>
+            <a:r>
+              <a:rPr sz="1300"/>
+              <a:t>Обяснете: "Всеки [i+offset] е потенциален срив. Сложните изрази натрупват риск."</a:t>
+            </a:r>
+          </a:p>
+          <a:p>
+            <a:r>
+              <a:rPr sz="1300"/>
+              <a:t>Задайте: "Как бихте опростили?" -&gt; насочете към: именувани междинни стъпки.</a:t>
+            </a:r>
+          </a:p>
+          <a:p>
+            <a:r>
+              <a:rPr sz="1300"/>
+              <a:t>Преход: "Нека видим как изглежда опростеният вариант."</a:t>
+            </a:r>
+          </a:p>
+        </p:txBody>
+      </p:sp>
+      <p:sp>
+        <p:nvSpPr>
+          <p:cNvPr id="4" name="Slide Number Placeholder 3"/>
+          <p:cNvSpPr>
+            <a:spLocks noGrp="1"/>
+          </p:cNvSpPr>
+          <p:nvPr>
+            <p:ph type="sldNum" idx="5" sz="quarter"/>
+          </p:nvPr>
+        </p:nvSpPr>
+        <p:spPr/>
+      </p:sp>
+    </p:spTree>
+  </p:cSld>
+  <p:clrMapOvr>
+    <a:masterClrMapping/>
+  </p:clrMapOvr>
+</p:notes>
+</file>
+
+<file path=ppt/notesSlides/notesSlide16.xml><?xml version="1.0" encoding="utf-8"?>
+<p:notes xmlns:a="http://schemas.openxmlformats.org/drawingml/2006/main" xmlns:p="http://schemas.openxmlformats.org/presentationml/2006/main" xmlns:r="http://schemas.openxmlformats.org/officeDocument/2006/relationships">
+  <p:cSld>
+    <p:spTree>
+      <p:nvGrpSpPr>
+        <p:cNvPr id="1" name=""/>
+        <p:cNvGrpSpPr/>
+        <p:nvPr/>
+      </p:nvGrpSpPr>
+      <p:grpSpPr>
+        <a:xfrm>
+          <a:off x="0" y="0"/>
+          <a:ext cx="0" cy="0"/>
+          <a:chOff x="0" y="0"/>
+          <a:chExt cx="0" cy="0"/>
+        </a:xfrm>
+      </p:grpSpPr>
+      <p:sp>
+        <p:nvSpPr>
+          <p:cNvPr id="2" name="Slide Image Placeholder 1"/>
+          <p:cNvSpPr>
+            <a:spLocks noGrp="1"/>
+          </p:cNvSpPr>
+          <p:nvPr>
+            <p:ph type="sldImg" idx="2"/>
+          </p:nvPr>
+        </p:nvSpPr>
+        <p:spPr/>
+      </p:sp>
+      <p:sp>
+        <p:nvSpPr>
+          <p:cNvPr id="3" name="Notes Placeholder 2"/>
+          <p:cNvSpPr>
+            <a:spLocks noGrp="1"/>
+          </p:cNvSpPr>
+          <p:nvPr>
+            <p:ph type="body" idx="3" sz="quarter"/>
+          </p:nvPr>
+        </p:nvSpPr>
+        <p:spPr/>
+        <p:txBody>
+          <a:bodyPr/>
+          <a:lstStyle/>
+          <a:p>
+            <a:r>
+              <a:rPr sz="1300"/>
+              <a:t>ОПРОСТЯВАНЕ НА СЛОЖНИ ИЗРАЗИ (3 мин.)</a:t>
+            </a:r>
+          </a:p>
+          <a:p>
+            <a:r>
+              <a:rPr sz="1300"/>
+              <a:t>Покажете рефакторирания вариант.</a:t>
+            </a:r>
+          </a:p>
+          <a:p>
+            <a:r>
+              <a:rPr sz="1300"/>
+              <a:t>Посочете: minXStartIndex, maxXcoord - всяка стъпка е именувана.</a:t>
+            </a:r>
+          </a:p>
+          <a:p>
+            <a:r>
+              <a:rPr sz="1300"/>
+              <a:t>Задайте: "Колко потенциални грешки сега?"</a:t>
+            </a:r>
+          </a:p>
+          <a:p>
+            <a:r>
+              <a:rPr sz="1300"/>
+              <a:t>Отговор: много по-малко - всяка стъпка се вижда и може да се тества отделно.</a:t>
+            </a:r>
+          </a:p>
+          <a:p>
+            <a:r>
+              <a:rPr sz="1300"/>
+              <a:t>Акцент: "Именуваната временна стъпка е БЕЗПЛАТНА - компилаторът я оптимизира."</a:t>
+            </a:r>
+          </a:p>
+          <a:p>
+            <a:r>
+              <a:rPr sz="1300"/>
+              <a:t>Преход: "Нека поговорим за мистериозните числа."</a:t>
+            </a:r>
+          </a:p>
+        </p:txBody>
+      </p:sp>
+      <p:sp>
+        <p:nvSpPr>
+          <p:cNvPr id="4" name="Slide Number Placeholder 3"/>
+          <p:cNvSpPr>
+            <a:spLocks noGrp="1"/>
+          </p:cNvSpPr>
+          <p:nvPr>
+            <p:ph type="sldNum" idx="5" sz="quarter"/>
+          </p:nvPr>
+        </p:nvSpPr>
+        <p:spPr/>
+      </p:sp>
+    </p:spTree>
+  </p:cSld>
+  <p:clrMapOvr>
+    <a:masterClrMapping/>
+  </p:clrMapOvr>
+</p:notes>
+</file>
+
+<file path=ppt/notesSlides/notesSlide17.xml><?xml version="1.0" encoding="utf-8"?>
+<p:notes xmlns:a="http://schemas.openxmlformats.org/drawingml/2006/main" xmlns:p="http://schemas.openxmlformats.org/presentationml/2006/main" xmlns:r="http://schemas.openxmlformats.org/officeDocument/2006/relationships">
+  <p:cSld>
+    <p:spTree>
+      <p:nvGrpSpPr>
+        <p:cNvPr id="1" name=""/>
+        <p:cNvGrpSpPr/>
+        <p:nvPr/>
+      </p:nvGrpSpPr>
+      <p:grpSpPr>
+        <a:xfrm>
+          <a:off x="0" y="0"/>
+          <a:ext cx="0" cy="0"/>
+          <a:chOff x="0" y="0"/>
+          <a:chExt cx="0" cy="0"/>
+        </a:xfrm>
+      </p:grpSpPr>
+      <p:sp>
+        <p:nvSpPr>
+          <p:cNvPr id="2" name="Slide Image Placeholder 1"/>
+          <p:cNvSpPr>
+            <a:spLocks noGrp="1"/>
+          </p:cNvSpPr>
+          <p:nvPr>
+            <p:ph type="sldImg" idx="2"/>
+          </p:nvPr>
+        </p:nvSpPr>
+        <p:spPr/>
+      </p:sp>
+      <p:sp>
+        <p:nvSpPr>
+          <p:cNvPr id="3" name="Notes Placeholder 2"/>
+          <p:cNvSpPr>
+            <a:spLocks noGrp="1"/>
+          </p:cNvSpPr>
+          <p:nvPr>
+            <p:ph type="body" idx="3" sz="quarter"/>
+          </p:nvPr>
+        </p:nvSpPr>
+        <p:spPr/>
+        <p:txBody>
+          <a:bodyPr/>
+          <a:lstStyle/>
+          <a:p>
+            <a:r>
+              <a:rPr sz="1300"/>
+              <a:t>МИСТЕРИОЗНИ ЧИСЛА - ВЪВЕДЕНИЕ (3 мин.)</a:t>
+            </a:r>
+          </a:p>
+          <a:p>
+            <a:r>
+              <a:rPr sz="1300"/>
+              <a:t>Задайте: "Виждали ли сте число като 1024 в код без обяснение?"</a:t>
+            </a:r>
+          </a:p>
+          <a:p>
+            <a:r>
+              <a:rPr sz="1300"/>
+              <a:t>Попитайте: "Какво значи 1024 в: if (size &gt; 1024)?"</a:t>
+            </a:r>
+          </a:p>
+          <a:p>
+            <a:r>
+              <a:rPr sz="1300"/>
+              <a:t>Отговор: не знаем! 1 KB? максимален брой потребители? буферен размер?</a:t>
+            </a:r>
+          </a:p>
+          <a:p>
+            <a:r>
+              <a:rPr sz="1300"/>
+              <a:t>Прочетете правилото: "Избягвайте всички литерали освен 0, 1, -1, null и празен низ."</a:t>
+            </a:r>
+          </a:p>
+          <a:p>
+            <a:r>
+              <a:rPr sz="1300"/>
+              <a:t>Акцент: "Всичко друго трябва да е именувана константа."</a:t>
+            </a:r>
+          </a:p>
+        </p:txBody>
+      </p:sp>
+      <p:sp>
+        <p:nvSpPr>
+          <p:cNvPr id="4" name="Slide Number Placeholder 3"/>
+          <p:cNvSpPr>
+            <a:spLocks noGrp="1"/>
+          </p:cNvSpPr>
+          <p:nvPr>
+            <p:ph type="sldNum" idx="5" sz="quarter"/>
+          </p:nvPr>
+        </p:nvSpPr>
+        <p:spPr/>
+      </p:sp>
+    </p:spTree>
+  </p:cSld>
+  <p:clrMapOvr>
+    <a:masterClrMapping/>
+  </p:clrMapOvr>
+</p:notes>
+</file>
+
+<file path=ppt/notesSlides/notesSlide18.xml><?xml version="1.0" encoding="utf-8"?>
+<p:notes xmlns:a="http://schemas.openxmlformats.org/drawingml/2006/main" xmlns:p="http://schemas.openxmlformats.org/presentationml/2006/main" xmlns:r="http://schemas.openxmlformats.org/officeDocument/2006/relationships">
+  <p:cSld>
+    <p:spTree>
+      <p:nvGrpSpPr>
+        <p:cNvPr id="1" name=""/>
+        <p:cNvGrpSpPr/>
+        <p:nvPr/>
+      </p:nvGrpSpPr>
+      <p:grpSpPr>
+        <a:xfrm>
+          <a:off x="0" y="0"/>
+          <a:ext cx="0" cy="0"/>
+          <a:chOff x="0" y="0"/>
+          <a:chExt cx="0" cy="0"/>
+        </a:xfrm>
+      </p:grpSpPr>
+      <p:sp>
+        <p:nvSpPr>
+          <p:cNvPr id="2" name="Slide Image Placeholder 1"/>
+          <p:cNvSpPr>
+            <a:spLocks noGrp="1"/>
+          </p:cNvSpPr>
+          <p:nvPr>
+            <p:ph type="sldImg" idx="2"/>
+          </p:nvPr>
+        </p:nvSpPr>
+        <p:spPr/>
+      </p:sp>
+      <p:sp>
+        <p:nvSpPr>
+          <p:cNvPr id="3" name="Notes Placeholder 2"/>
+          <p:cNvSpPr>
+            <a:spLocks noGrp="1"/>
+          </p:cNvSpPr>
+          <p:nvPr>
+            <p:ph type="body" idx="3" sz="quarter"/>
+          </p:nvPr>
+        </p:nvSpPr>
+        <p:spPr/>
+        <p:txBody>
+          <a:bodyPr/>
+          <a:lstStyle/>
+          <a:p>
+            <a:r>
+              <a:rPr sz="1300"/>
+              <a:t>ЗЛИТЕ МИСТЕРИОЗНИ ЧИСЛА - ПРИМЕР (2 мин.)</a:t>
+            </a:r>
+          </a:p>
+          <a:p>
+            <a:r>
+              <a:rPr sz="1300"/>
+              <a:t>Покажете GeometryUtils с 3.14159206 директно в кода.</a:t>
+            </a:r>
+          </a:p>
+          <a:p>
+            <a:r>
+              <a:rPr sz="1300"/>
+              <a:t>Задайте: "Ако трябва да промените точността на PI - колко места в кода ще трябва да промените?"</a:t>
+            </a:r>
+          </a:p>
+          <a:p>
+            <a:r>
+              <a:rPr sz="1300"/>
+              <a:t>Отговор: всеки метод поотделно - опасно, лесно се пропуска.</a:t>
+            </a:r>
+          </a:p>
+          <a:p>
+            <a:r>
+              <a:rPr sz="1300"/>
+              <a:t>Акцент: "Мистериозните числа нарушават DRY: Don't Repeat Yourself."</a:t>
+            </a:r>
+          </a:p>
+          <a:p>
+            <a:r>
+              <a:rPr sz="1300"/>
+              <a:t>Преход: "Нека видим как се поправя с константа."</a:t>
+            </a:r>
+          </a:p>
+        </p:txBody>
+      </p:sp>
+      <p:sp>
+        <p:nvSpPr>
+          <p:cNvPr id="4" name="Slide Number Placeholder 3"/>
+          <p:cNvSpPr>
+            <a:spLocks noGrp="1"/>
+          </p:cNvSpPr>
+          <p:nvPr>
+            <p:ph type="sldNum" idx="5" sz="quarter"/>
+          </p:nvPr>
+        </p:nvSpPr>
+        <p:spPr/>
+      </p:sp>
+    </p:spTree>
+  </p:cSld>
+  <p:clrMapOvr>
+    <a:masterClrMapping/>
+  </p:clrMapOvr>
+</p:notes>
+</file>
+
+<file path=ppt/notesSlides/notesSlide19.xml><?xml version="1.0" encoding="utf-8"?>
+<p:notes xmlns:a="http://schemas.openxmlformats.org/drawingml/2006/main" xmlns:p="http://schemas.openxmlformats.org/presentationml/2006/main" xmlns:r="http://schemas.openxmlformats.org/officeDocument/2006/relationships">
+  <p:cSld>
+    <p:spTree>
+      <p:nvGrpSpPr>
+        <p:cNvPr id="1" name=""/>
+        <p:cNvGrpSpPr/>
+        <p:nvPr/>
+      </p:nvGrpSpPr>
+      <p:grpSpPr>
+        <a:xfrm>
+          <a:off x="0" y="0"/>
+          <a:ext cx="0" cy="0"/>
+          <a:chOff x="0" y="0"/>
+          <a:chExt cx="0" cy="0"/>
+        </a:xfrm>
+      </p:grpSpPr>
+      <p:sp>
+        <p:nvSpPr>
+          <p:cNvPr id="2" name="Slide Image Placeholder 1"/>
+          <p:cNvSpPr>
+            <a:spLocks noGrp="1"/>
+          </p:cNvSpPr>
+          <p:nvPr>
+            <p:ph type="sldImg" idx="2"/>
+          </p:nvPr>
+        </p:nvSpPr>
+        <p:spPr/>
+      </p:sp>
+      <p:sp>
+        <p:nvSpPr>
+          <p:cNvPr id="3" name="Notes Placeholder 2"/>
+          <p:cNvSpPr>
+            <a:spLocks noGrp="1"/>
+          </p:cNvSpPr>
+          <p:nvPr>
+            <p:ph type="body" idx="3" sz="quarter"/>
+          </p:nvPr>
+        </p:nvSpPr>
+        <p:spPr/>
+        <p:txBody>
+          <a:bodyPr/>
+          <a:lstStyle/>
+          <a:p>
+            <a:r>
+              <a:rPr sz="1300"/>
+              <a:t>КОНСТАНТИ ВМЕСТО МИСТЕРИОЗНИ ЧИСЛА (3 мин.)</a:t>
+            </a:r>
+          </a:p>
+          <a:p>
+            <a:r>
+              <a:rPr sz="1300"/>
+              <a:t>Покажете рефакторирания GeometryUtils с public const double PI = 3.14159206;</a:t>
+            </a:r>
+          </a:p>
+          <a:p>
+            <a:r>
+              <a:rPr sz="1300"/>
+              <a:t>Задайте: "Какви са предимствата?"</a:t>
+            </a:r>
+          </a:p>
+          <a:p>
+            <a:r>
+              <a:rPr sz="1300"/>
+              <a:t>Отговор:</a:t>
+            </a:r>
+          </a:p>
+          <a:p>
+            <a:r>
+              <a:rPr sz="1300"/>
+              <a:t>  1. Промяна само на едно място.</a:t>
+            </a:r>
+          </a:p>
+          <a:p>
+            <a:r>
+              <a:rPr sz="1300"/>
+              <a:t>  2. Самодокументиращо: PI е по-ясно от 3.14159206.</a:t>
+            </a:r>
+          </a:p>
+          <a:p>
+            <a:r>
+              <a:rPr sz="1300"/>
+              <a:t>  3. IntelliSense показва PI при автодопълване.</a:t>
+            </a:r>
+          </a:p>
+          <a:p>
+            <a:r>
+              <a:rPr sz="1300"/>
+              <a:t>Акцент: "Константата е документация + защита от грешки при промяна."</a:t>
+            </a:r>
+          </a:p>
+        </p:txBody>
+      </p:sp>
+      <p:sp>
+        <p:nvSpPr>
+          <p:cNvPr id="4" name="Slide Number Placeholder 3"/>
+          <p:cNvSpPr>
+            <a:spLocks noGrp="1"/>
+          </p:cNvSpPr>
+          <p:nvPr>
+            <p:ph type="sldNum" idx="5" sz="quarter"/>
+          </p:nvPr>
+        </p:nvSpPr>
+        <p:spPr/>
+      </p:sp>
+    </p:spTree>
+  </p:cSld>
+  <p:clrMapOvr>
+    <a:masterClrMapping/>
+  </p:clrMapOvr>
+</p:notes>
+</file>
+
+<file path=ppt/notesSlides/notesSlide2.xml><?xml version="1.0" encoding="utf-8"?>
+<p:notes xmlns:a="http://schemas.openxmlformats.org/drawingml/2006/main" xmlns:p="http://schemas.openxmlformats.org/presentationml/2006/main" xmlns:r="http://schemas.openxmlformats.org/officeDocument/2006/relationships">
+  <p:cSld>
+    <p:spTree>
+      <p:nvGrpSpPr>
+        <p:cNvPr id="1" name=""/>
+        <p:cNvGrpSpPr/>
+        <p:nvPr/>
+      </p:nvGrpSpPr>
+      <p:grpSpPr>
+        <a:xfrm>
+          <a:off x="0" y="0"/>
+          <a:ext cx="0" cy="0"/>
+          <a:chOff x="0" y="0"/>
+          <a:chExt cx="0" cy="0"/>
+        </a:xfrm>
+      </p:grpSpPr>
+      <p:sp>
+        <p:nvSpPr>
+          <p:cNvPr id="2" name="Slide Image Placeholder 1"/>
+          <p:cNvSpPr>
+            <a:spLocks noGrp="1"/>
+          </p:cNvSpPr>
+          <p:nvPr>
+            <p:ph type="sldImg" idx="2"/>
+          </p:nvPr>
+        </p:nvSpPr>
+        <p:spPr/>
+      </p:sp>
+      <p:sp>
+        <p:nvSpPr>
+          <p:cNvPr id="3" name="Notes Placeholder 2"/>
+          <p:cNvSpPr>
+            <a:spLocks noGrp="1"/>
+          </p:cNvSpPr>
+          <p:nvPr>
+            <p:ph type="body" idx="3" sz="quarter"/>
+          </p:nvPr>
+        </p:nvSpPr>
+        <p:spPr/>
+        <p:txBody>
+          <a:bodyPr/>
+          <a:lstStyle/>
+          <a:p>
+            <a:r>
+              <a:rPr sz="1300"/>
+              <a:t>ВСТЪПЛЕНИЕ (1-2 мин.)</a:t>
+            </a:r>
+          </a:p>
+          <a:p>
+            <a:r>
+              <a:rPr sz="1300"/>
+              <a:t>Кажете: "Днес ще говорим за нещо, което изглежда тривиално - как декларираме и използваме променливи. Но лошите навици тук водят до трудно откриваеми грешки."</a:t>
+            </a:r>
+          </a:p>
+          <a:p>
+            <a:r>
+              <a:rPr sz="1300"/>
+              <a:t>Въпрос: "Кой е забравял да инициализира брояч в цикъл и после е получил грешни резултати?"</a:t>
+            </a:r>
+          </a:p>
+          <a:p>
+            <a:r>
+              <a:rPr sz="1300"/>
+              <a:t>Изчакайте реакция - ако никой не вдигне ръка: "Скоро ще ви се случи. Затова сме тук."</a:t>
+            </a:r>
+          </a:p>
+        </p:txBody>
+      </p:sp>
+      <p:sp>
+        <p:nvSpPr>
+          <p:cNvPr id="4" name="Slide Number Placeholder 3"/>
+          <p:cNvSpPr>
+            <a:spLocks noGrp="1"/>
+          </p:cNvSpPr>
+          <p:nvPr>
+            <p:ph type="sldNum" idx="5" sz="quarter"/>
+          </p:nvPr>
+        </p:nvSpPr>
+        <p:spPr/>
+      </p:sp>
+    </p:spTree>
+  </p:cSld>
+  <p:clrMapOvr>
+    <a:masterClrMapping/>
+  </p:clrMapOvr>
+</p:notes>
+</file>
+
+<file path=ppt/notesSlides/notesSlide20.xml><?xml version="1.0" encoding="utf-8"?>
+<p:notes xmlns:a="http://schemas.openxmlformats.org/drawingml/2006/main" xmlns:p="http://schemas.openxmlformats.org/presentationml/2006/main" xmlns:r="http://schemas.openxmlformats.org/officeDocument/2006/relationships">
+  <p:cSld>
+    <p:spTree>
+      <p:nvGrpSpPr>
+        <p:cNvPr id="1" name=""/>
+        <p:cNvGrpSpPr/>
+        <p:nvPr/>
+      </p:nvGrpSpPr>
+      <p:grpSpPr>
+        <a:xfrm>
+          <a:off x="0" y="0"/>
+          <a:ext cx="0" cy="0"/>
+          <a:chOff x="0" y="0"/>
+          <a:chExt cx="0" cy="0"/>
+        </a:xfrm>
+      </p:grpSpPr>
+      <p:sp>
+        <p:nvSpPr>
+          <p:cNvPr id="2" name="Slide Image Placeholder 1"/>
+          <p:cNvSpPr>
+            <a:spLocks noGrp="1"/>
+          </p:cNvSpPr>
+          <p:nvPr>
+            <p:ph type="sldImg" idx="2"/>
+          </p:nvPr>
+        </p:nvSpPr>
+        <p:spPr/>
+      </p:sp>
+      <p:sp>
+        <p:nvSpPr>
+          <p:cNvPr id="3" name="Notes Placeholder 2"/>
+          <p:cNvSpPr>
+            <a:spLocks noGrp="1"/>
+          </p:cNvSpPr>
+          <p:nvPr>
+            <p:ph type="body" idx="3" sz="quarter"/>
+          </p:nvPr>
+        </p:nvSpPr>
+        <p:spPr/>
+        <p:txBody>
+          <a:bodyPr/>
+          <a:lstStyle/>
+          <a:p>
+            <a:r>
+              <a:rPr sz="1300"/>
+              <a:t>ВИДОВЕ КОНСТАНТИ В C# (3 мин.)</a:t>
+            </a:r>
+          </a:p>
+          <a:p>
+            <a:r>
+              <a:rPr sz="1300"/>
+              <a:t>Обяснете двата вида:</a:t>
+            </a:r>
+          </a:p>
+          <a:p>
+            <a:r>
+              <a:rPr sz="1300"/>
+              <a:t>  const double PI = 3.14...; -&gt; compile-time: заменя се директно в кода, не може да се промени при runtime.</a:t>
+            </a:r>
+          </a:p>
+          <a:p>
+            <a:r>
+              <a:rPr sz="1300"/>
+              <a:t>  static readonly string ConfigFile = ...; -&gt; run-time: инициализира се при стартиране, по-гъвкав.</a:t>
+            </a:r>
+          </a:p>
+          <a:p>
+            <a:r>
+              <a:rPr sz="1300"/>
+              <a:t>Задайте: "Кога ще ползвате readonly вместо const?"</a:t>
+            </a:r>
+          </a:p>
+          <a:p>
+            <a:r>
+              <a:rPr sz="1300"/>
+              <a:t>Отговор: когато стойността се изчислява при стартиране (от конфиг файл, от среда).</a:t>
+            </a:r>
+          </a:p>
+          <a:p>
+            <a:r>
+              <a:rPr sz="1300"/>
+              <a:t>Практика: "При числови математически константи: const. При конфигурации: readonly."</a:t>
+            </a:r>
+          </a:p>
+        </p:txBody>
+      </p:sp>
+      <p:sp>
+        <p:nvSpPr>
+          <p:cNvPr id="4" name="Slide Number Placeholder 3"/>
+          <p:cNvSpPr>
+            <a:spLocks noGrp="1"/>
+          </p:cNvSpPr>
+          <p:nvPr>
+            <p:ph type="sldNum" idx="5" sz="quarter"/>
+          </p:nvPr>
+        </p:nvSpPr>
+        <p:spPr/>
+      </p:sp>
+    </p:spTree>
+  </p:cSld>
+  <p:clrMapOvr>
+    <a:masterClrMapping/>
+  </p:clrMapOvr>
+</p:notes>
+</file>
+
+<file path=ppt/notesSlides/notesSlide21.xml><?xml version="1.0" encoding="utf-8"?>
+<p:notes xmlns:a="http://schemas.openxmlformats.org/drawingml/2006/main" xmlns:p="http://schemas.openxmlformats.org/presentationml/2006/main" xmlns:r="http://schemas.openxmlformats.org/officeDocument/2006/relationships">
+  <p:cSld>
+    <p:spTree>
+      <p:nvGrpSpPr>
+        <p:cNvPr id="1" name=""/>
+        <p:cNvGrpSpPr/>
+        <p:nvPr/>
+      </p:nvGrpSpPr>
+      <p:grpSpPr>
+        <a:xfrm>
+          <a:off x="0" y="0"/>
+          <a:ext cx="0" cy="0"/>
+          <a:chOff x="0" y="0"/>
+          <a:chExt cx="0" cy="0"/>
+        </a:xfrm>
+      </p:grpSpPr>
+      <p:sp>
+        <p:nvSpPr>
+          <p:cNvPr id="2" name="Slide Image Placeholder 1"/>
+          <p:cNvSpPr>
+            <a:spLocks noGrp="1"/>
+          </p:cNvSpPr>
+          <p:nvPr>
+            <p:ph type="sldImg" idx="2"/>
+          </p:nvPr>
+        </p:nvSpPr>
+        <p:spPr/>
+      </p:sp>
+      <p:sp>
+        <p:nvSpPr>
+          <p:cNvPr id="3" name="Notes Placeholder 2"/>
+          <p:cNvSpPr>
+            <a:spLocks noGrp="1"/>
+          </p:cNvSpPr>
+          <p:nvPr>
+            <p:ph type="body" idx="3" sz="quarter"/>
+          </p:nvPr>
+        </p:nvSpPr>
+        <p:spPr/>
+        <p:txBody>
+          <a:bodyPr/>
+          <a:lstStyle/>
+          <a:p>
+            <a:r>
+              <a:rPr sz="1300"/>
+              <a:t>КОГА ДА ПОЛЗВАМЕ КОНСТАНТИ (2 мин.)</a:t>
+            </a:r>
+          </a:p>
+          <a:p>
+            <a:r>
+              <a:rPr sz="1300"/>
+              <a:t>Бърз преглед на трите случая:</a:t>
+            </a:r>
+          </a:p>
+          <a:p>
+            <a:r>
+              <a:rPr sz="1300"/>
+              <a:t>  1. Имена на файлове: SettingsFileName = "ApplicationSettings.xml"</a:t>
+            </a:r>
+          </a:p>
+          <a:p>
+            <a:r>
+              <a:rPr sz="1300"/>
+              <a:t>  2. Математически константи: E = 2.718...</a:t>
+            </a:r>
+          </a:p>
+          <a:p>
+            <a:r>
+              <a:rPr sz="1300"/>
+              <a:t>  3. Граници: ReadBufferSize = 5 * 1024 * 1024 - 5 MB, ясно изразено</a:t>
+            </a:r>
+          </a:p>
+          <a:p>
+            <a:r>
+              <a:rPr sz="1300"/>
+              <a:t>Акцент: "5 * 1024 * 1024 е по-ясно от 5242880 - даже константите могат да са изрази."</a:t>
+            </a:r>
+          </a:p>
+          <a:p>
+            <a:r>
+              <a:rPr sz="1300"/>
+              <a:t>Задайте: "Дайте пример за константа от реален проект."</a:t>
+            </a:r>
+          </a:p>
+        </p:txBody>
+      </p:sp>
+      <p:sp>
+        <p:nvSpPr>
+          <p:cNvPr id="4" name="Slide Number Placeholder 3"/>
+          <p:cNvSpPr>
+            <a:spLocks noGrp="1"/>
+          </p:cNvSpPr>
+          <p:nvPr>
+            <p:ph type="sldNum" idx="5" sz="quarter"/>
+          </p:nvPr>
+        </p:nvSpPr>
+        <p:spPr/>
+      </p:sp>
+    </p:spTree>
+  </p:cSld>
+  <p:clrMapOvr>
+    <a:masterClrMapping/>
+  </p:clrMapOvr>
+</p:notes>
+</file>
+
+<file path=ppt/notesSlides/notesSlide22.xml><?xml version="1.0" encoding="utf-8"?>
+<p:notes xmlns:a="http://schemas.openxmlformats.org/drawingml/2006/main" xmlns:p="http://schemas.openxmlformats.org/presentationml/2006/main" xmlns:r="http://schemas.openxmlformats.org/officeDocument/2006/relationships">
+  <p:cSld>
+    <p:spTree>
+      <p:nvGrpSpPr>
+        <p:cNvPr id="1" name=""/>
+        <p:cNvGrpSpPr/>
+        <p:nvPr/>
+      </p:nvGrpSpPr>
+      <p:grpSpPr>
+        <a:xfrm>
+          <a:off x="0" y="0"/>
+          <a:ext cx="0" cy="0"/>
+          <a:chOff x="0" y="0"/>
+          <a:chExt cx="0" cy="0"/>
+        </a:xfrm>
+      </p:grpSpPr>
+      <p:sp>
+        <p:nvSpPr>
+          <p:cNvPr id="2" name="Slide Image Placeholder 1"/>
+          <p:cNvSpPr>
+            <a:spLocks noGrp="1"/>
+          </p:cNvSpPr>
+          <p:nvPr>
+            <p:ph type="sldImg" idx="2"/>
+          </p:nvPr>
+        </p:nvSpPr>
+        <p:spPr/>
+      </p:sp>
+      <p:sp>
+        <p:nvSpPr>
+          <p:cNvPr id="3" name="Notes Placeholder 2"/>
+          <p:cNvSpPr>
+            <a:spLocks noGrp="1"/>
+          </p:cNvSpPr>
+          <p:nvPr>
+            <p:ph type="body" idx="3" sz="quarter"/>
+          </p:nvPr>
+        </p:nvSpPr>
+        <p:spPr/>
+        <p:txBody>
+          <a:bodyPr/>
+          <a:lstStyle/>
+          <a:p>
+            <a:r>
+              <a:rPr sz="1300"/>
+              <a:t>КОГА ДА ИЗБЯГВАМЕ КОНСТАНТИ (3 мин.)</a:t>
+            </a:r>
+          </a:p>
+          <a:p>
+            <a:r>
+              <a:rPr sz="1300"/>
+              <a:t>Обяснете: "Не всичко трябва да е константа."</a:t>
+            </a:r>
+          </a:p>
+          <a:p>
+            <a:r>
+              <a:rPr sz="1300"/>
+              <a:t>  - Съобщения за грешки -&gt; ресурси (за интернационализация)</a:t>
+            </a:r>
+          </a:p>
+          <a:p>
+            <a:r>
+              <a:rPr sz="1300"/>
+              <a:t>  - SQL команди -&gt; ползвайте ORM или отделно хранилище</a:t>
+            </a:r>
+          </a:p>
+          <a:p>
+            <a:r>
+              <a:rPr sz="1300"/>
+              <a:t>  - GUI етикети -&gt; ресурси, не константи</a:t>
+            </a:r>
+          </a:p>
+          <a:p>
+            <a:r>
+              <a:rPr sz="1300"/>
+              <a:t>Задайте: "Защо SQL командата не е добра константа?"</a:t>
+            </a:r>
+          </a:p>
+          <a:p>
+            <a:r>
+              <a:rPr sz="1300"/>
+              <a:t>Отговор: промяна на схемата изисква промяна на константата + рекомпилация.</a:t>
+            </a:r>
+          </a:p>
+          <a:p>
+            <a:r>
+              <a:rPr sz="1300"/>
+              <a:t>Акцент: "За всичко, свързано с локализация - ползвайте .resx ресурси."</a:t>
+            </a:r>
+          </a:p>
+        </p:txBody>
+      </p:sp>
+      <p:sp>
+        <p:nvSpPr>
+          <p:cNvPr id="4" name="Slide Number Placeholder 3"/>
+          <p:cNvSpPr>
+            <a:spLocks noGrp="1"/>
+          </p:cNvSpPr>
+          <p:nvPr>
+            <p:ph type="sldNum" idx="5" sz="quarter"/>
+          </p:nvPr>
+        </p:nvSpPr>
+        <p:spPr/>
+      </p:sp>
+    </p:spTree>
+  </p:cSld>
+  <p:clrMapOvr>
+    <a:masterClrMapping/>
+  </p:clrMapOvr>
+</p:notes>
+</file>
+
+<file path=ppt/notesSlides/notesSlide23.xml><?xml version="1.0" encoding="utf-8"?>
+<p:notes xmlns:a="http://schemas.openxmlformats.org/drawingml/2006/main" xmlns:p="http://schemas.openxmlformats.org/presentationml/2006/main" xmlns:r="http://schemas.openxmlformats.org/officeDocument/2006/relationships">
+  <p:cSld>
+    <p:spTree>
+      <p:nvGrpSpPr>
+        <p:cNvPr id="1" name=""/>
+        <p:cNvGrpSpPr/>
+        <p:nvPr/>
+      </p:nvGrpSpPr>
+      <p:grpSpPr>
+        <a:xfrm>
+          <a:off x="0" y="0"/>
+          <a:ext cx="0" cy="0"/>
+          <a:chOff x="0" y="0"/>
+          <a:chExt cx="0" cy="0"/>
+        </a:xfrm>
+      </p:grpSpPr>
+      <p:sp>
+        <p:nvSpPr>
+          <p:cNvPr id="2" name="Slide Image Placeholder 1"/>
+          <p:cNvSpPr>
+            <a:spLocks noGrp="1"/>
+          </p:cNvSpPr>
+          <p:nvPr>
+            <p:ph type="sldImg" idx="2"/>
+          </p:nvPr>
+        </p:nvSpPr>
+        <p:spPr/>
+      </p:sp>
+      <p:sp>
+        <p:nvSpPr>
+          <p:cNvPr id="3" name="Notes Placeholder 2"/>
+          <p:cNvSpPr>
+            <a:spLocks noGrp="1"/>
+          </p:cNvSpPr>
+          <p:nvPr>
+            <p:ph type="body" idx="3" sz="quarter"/>
+          </p:nvPr>
+        </p:nvSpPr>
+        <p:spPr/>
+        <p:txBody>
+          <a:bodyPr/>
+          <a:lstStyle/>
+          <a:p>
+            <a:r>
+              <a:rPr sz="1300"/>
+              <a:t>ОБОБЩЕНИЕ (3 мин.)</a:t>
+            </a:r>
+          </a:p>
+          <a:p>
+            <a:r>
+              <a:rPr sz="1300"/>
+              <a:t>Задайте тези въпроси за преговор:</a:t>
+            </a:r>
+          </a:p>
+          <a:p>
+            <a:r>
+              <a:rPr sz="1300"/>
+              <a:t>  "Кои са трите правила за инициализация?"</a:t>
+            </a:r>
+          </a:p>
+          <a:p>
+            <a:r>
+              <a:rPr sz="1300"/>
+              <a:t>  "Защо избягваме голям обхват на променливите?"</a:t>
+            </a:r>
+          </a:p>
+          <a:p>
+            <a:r>
+              <a:rPr sz="1300"/>
+              <a:t>  "Какво е magic number и как го елиминираме?"</a:t>
+            </a:r>
+          </a:p>
+          <a:p>
+            <a:r>
+              <a:rPr sz="1300"/>
+              <a:t>Ключово послание: "Добрият код с добри имена, малък обхват и константи вместо числа е по-лесен за четене, промяна и дебъгване."</a:t>
+            </a:r>
+          </a:p>
+          <a:p>
+            <a:r>
+              <a:rPr sz="1300"/>
+              <a:t>Ако има упражнения: обявете ги сега.</a:t>
+            </a:r>
+          </a:p>
+        </p:txBody>
+      </p:sp>
+      <p:sp>
+        <p:nvSpPr>
+          <p:cNvPr id="4" name="Slide Number Placeholder 3"/>
+          <p:cNvSpPr>
+            <a:spLocks noGrp="1"/>
+          </p:cNvSpPr>
+          <p:nvPr>
+            <p:ph type="sldNum" idx="5" sz="quarter"/>
+          </p:nvPr>
+        </p:nvSpPr>
+        <p:spPr/>
+      </p:sp>
+    </p:spTree>
+  </p:cSld>
+  <p:clrMapOvr>
+    <a:masterClrMapping/>
+  </p:clrMapOvr>
+</p:notes>
+</file>
+
+<file path=ppt/notesSlides/notesSlide24.xml><?xml version="1.0" encoding="utf-8"?>
+<p:notes xmlns:a="http://schemas.openxmlformats.org/drawingml/2006/main" xmlns:p="http://schemas.openxmlformats.org/presentationml/2006/main" xmlns:r="http://schemas.openxmlformats.org/officeDocument/2006/relationships">
+  <p:cSld>
+    <p:spTree>
+      <p:nvGrpSpPr>
+        <p:cNvPr id="1" name=""/>
+        <p:cNvGrpSpPr/>
+        <p:nvPr/>
+      </p:nvGrpSpPr>
+      <p:grpSpPr>
+        <a:xfrm>
+          <a:off x="0" y="0"/>
+          <a:ext cx="0" cy="0"/>
+          <a:chOff x="0" y="0"/>
+          <a:chExt cx="0" cy="0"/>
+        </a:xfrm>
+      </p:grpSpPr>
+      <p:sp>
+        <p:nvSpPr>
+          <p:cNvPr id="2" name="Slide Image Placeholder 1"/>
+          <p:cNvSpPr>
+            <a:spLocks noGrp="1"/>
+          </p:cNvSpPr>
+          <p:nvPr>
+            <p:ph type="sldImg" idx="2"/>
+          </p:nvPr>
+        </p:nvSpPr>
+        <p:spPr/>
+      </p:sp>
+      <p:sp>
+        <p:nvSpPr>
+          <p:cNvPr id="3" name="Notes Placeholder 2"/>
+          <p:cNvSpPr>
+            <a:spLocks noGrp="1"/>
+          </p:cNvSpPr>
+          <p:nvPr>
+            <p:ph type="body" idx="3" sz="quarter"/>
+          </p:nvPr>
+        </p:nvSpPr>
+        <p:spPr/>
+        <p:txBody>
+          <a:bodyPr/>
+          <a:lstStyle/>
+          <a:p>
+            <a:r>
+              <a:rPr sz="1300"/>
+              <a:t>КРАЙ НА ПРЕЗЕНТАЦИЯТА</a:t>
+            </a:r>
+          </a:p>
+          <a:p>
+            <a:r>
+              <a:rPr sz="1300"/>
+              <a:t>Приключете с: "Материалите са достъпни в системата. На следващия час - упражнения."</a:t>
+            </a:r>
+          </a:p>
+          <a:p>
+            <a:r>
+              <a:rPr sz="1300"/>
+              <a:t>Ако са останали въпроси - отговорете сега.</a:t>
+            </a:r>
+          </a:p>
+        </p:txBody>
+      </p:sp>
+      <p:sp>
+        <p:nvSpPr>
+          <p:cNvPr id="4" name="Slide Number Placeholder 3"/>
+          <p:cNvSpPr>
+            <a:spLocks noGrp="1"/>
+          </p:cNvSpPr>
+          <p:nvPr>
+            <p:ph type="sldNum" idx="5" sz="quarter"/>
+          </p:nvPr>
+        </p:nvSpPr>
+        <p:spPr/>
+      </p:sp>
+    </p:spTree>
+  </p:cSld>
+  <p:clrMapOvr>
+    <a:masterClrMapping/>
+  </p:clrMapOvr>
+</p:notes>
+</file>
+
+<file path=ppt/notesSlides/notesSlide3.xml><?xml version="1.0" encoding="utf-8"?>
+<p:notes xmlns:a="http://schemas.openxmlformats.org/drawingml/2006/main" xmlns:p="http://schemas.openxmlformats.org/presentationml/2006/main" xmlns:r="http://schemas.openxmlformats.org/officeDocument/2006/relationships">
+  <p:cSld>
+    <p:spTree>
+      <p:nvGrpSpPr>
+        <p:cNvPr id="1" name=""/>
+        <p:cNvGrpSpPr/>
+        <p:nvPr/>
+      </p:nvGrpSpPr>
+      <p:grpSpPr>
+        <a:xfrm>
+          <a:off x="0" y="0"/>
+          <a:ext cx="0" cy="0"/>
+          <a:chOff x="0" y="0"/>
+          <a:chExt cx="0" cy="0"/>
+        </a:xfrm>
+      </p:grpSpPr>
+      <p:sp>
+        <p:nvSpPr>
+          <p:cNvPr id="2" name="Slide Image Placeholder 1"/>
+          <p:cNvSpPr>
+            <a:spLocks noGrp="1"/>
+          </p:cNvSpPr>
+          <p:nvPr>
+            <p:ph type="sldImg" idx="2"/>
+          </p:nvPr>
+        </p:nvSpPr>
+        <p:spPr/>
+      </p:sp>
+      <p:sp>
+        <p:nvSpPr>
+          <p:cNvPr id="3" name="Notes Placeholder 2"/>
+          <p:cNvSpPr>
+            <a:spLocks noGrp="1"/>
+          </p:cNvSpPr>
+          <p:nvPr>
+            <p:ph type="body" idx="3" sz="quarter"/>
+          </p:nvPr>
+        </p:nvSpPr>
+        <p:spPr/>
+        <p:txBody>
+          <a:bodyPr/>
+          <a:lstStyle/>
+          <a:p>
+            <a:r>
+              <a:rPr sz="1300"/>
+              <a:t>ИНИЦИАЛИЗАЦИЯ НА ПРОМЕНЛИВИ - Ч.1 (3 мин.)</a:t>
+            </a:r>
+          </a:p>
+          <a:p>
+            <a:r>
+              <a:rPr sz="1300"/>
+              <a:t>Задайте: "Какво ще се случи, ако пуснем: int value; Console.WriteLine(value);"</a:t>
+            </a:r>
+          </a:p>
+          <a:p>
+            <a:r>
+              <a:rPr sz="1300"/>
+              <a:t>Изчакайте отговор -&gt; compile error в C# (грешка при компилация).</a:t>
+            </a:r>
+          </a:p>
+          <a:p>
+            <a:r>
+              <a:rPr sz="1300"/>
+              <a:t>Обяснете: "C# е строго типизиран - не позволява използване на неинициализирани локални."</a:t>
+            </a:r>
+          </a:p>
+          <a:p>
+            <a:r>
+              <a:rPr sz="1300"/>
+              <a:t>Акцент: "Декларирайте БЛИЗО до употребата - не в началото на метода, а точно преди нужния ред."</a:t>
+            </a:r>
+          </a:p>
+          <a:p>
+            <a:r>
+              <a:rPr sz="1300"/>
+              <a:t>Защо? "По-малко разстояние между декларация и употреба = по-лесно четиво."</a:t>
+            </a:r>
+          </a:p>
+        </p:txBody>
+      </p:sp>
+      <p:sp>
+        <p:nvSpPr>
+          <p:cNvPr id="4" name="Slide Number Placeholder 3"/>
+          <p:cNvSpPr>
+            <a:spLocks noGrp="1"/>
+          </p:cNvSpPr>
+          <p:nvPr>
+            <p:ph type="sldNum" idx="5" sz="quarter"/>
+          </p:nvPr>
+        </p:nvSpPr>
+        <p:spPr/>
+      </p:sp>
+    </p:spTree>
+  </p:cSld>
+  <p:clrMapOvr>
+    <a:masterClrMapping/>
+  </p:clrMapOvr>
+</p:notes>
+</file>
+
+<file path=ppt/notesSlides/notesSlide4.xml><?xml version="1.0" encoding="utf-8"?>
+<p:notes xmlns:a="http://schemas.openxmlformats.org/drawingml/2006/main" xmlns:p="http://schemas.openxmlformats.org/presentationml/2006/main" xmlns:r="http://schemas.openxmlformats.org/officeDocument/2006/relationships">
+  <p:cSld>
+    <p:spTree>
+      <p:nvGrpSpPr>
+        <p:cNvPr id="1" name=""/>
+        <p:cNvGrpSpPr/>
+        <p:nvPr/>
+      </p:nvGrpSpPr>
+      <p:grpSpPr>
+        <a:xfrm>
+          <a:off x="0" y="0"/>
+          <a:ext cx="0" cy="0"/>
+          <a:chOff x="0" y="0"/>
+          <a:chExt cx="0" cy="0"/>
+        </a:xfrm>
+      </p:grpSpPr>
+      <p:sp>
+        <p:nvSpPr>
+          <p:cNvPr id="2" name="Slide Image Placeholder 1"/>
+          <p:cNvSpPr>
+            <a:spLocks noGrp="1"/>
+          </p:cNvSpPr>
+          <p:nvPr>
+            <p:ph type="sldImg" idx="2"/>
+          </p:nvPr>
+        </p:nvSpPr>
+        <p:spPr/>
+      </p:sp>
+      <p:sp>
+        <p:nvSpPr>
+          <p:cNvPr id="3" name="Notes Placeholder 2"/>
+          <p:cNvSpPr>
+            <a:spLocks noGrp="1"/>
+          </p:cNvSpPr>
+          <p:nvPr>
+            <p:ph type="body" idx="3" sz="quarter"/>
+          </p:nvPr>
+        </p:nvSpPr>
+        <p:spPr/>
+        <p:txBody>
+          <a:bodyPr/>
+          <a:lstStyle/>
+          <a:p>
+            <a:r>
+              <a:rPr sz="1300"/>
+              <a:t>ИНИЦИАЛИЗАЦИЯ - БРОЯЧИ И КОЛЕКТОРИ (3 мин.)</a:t>
+            </a:r>
+          </a:p>
+          <a:p>
+            <a:r>
+              <a:rPr sz="1300"/>
+              <a:t>Покажете примера с вложените цикли.</a:t>
+            </a:r>
+          </a:p>
+          <a:p>
+            <a:r>
+              <a:rPr sz="1300"/>
+              <a:t>Задайте: "Каква е грешката?" - изчакайте учениците да я открият.</a:t>
+            </a:r>
+          </a:p>
+          <a:p>
+            <a:r>
+              <a:rPr sz="1300"/>
+              <a:t>Отговор: сумата (sum) не се нулира преди вътрешния цикъл -&gt; резултатите се натрупват.</a:t>
+            </a:r>
+          </a:p>
+          <a:p>
+            <a:r>
+              <a:rPr sz="1300"/>
+              <a:t>Акцент: "Това е КЛАСИЧЕСКА грешка при матрични операции и обработка на данни."</a:t>
+            </a:r>
+          </a:p>
+          <a:p>
+            <a:r>
+              <a:rPr sz="1300"/>
+              <a:t>Правило: "Инициализирайте колектора точно преди цикъла, от който го пълните."</a:t>
+            </a:r>
+          </a:p>
+        </p:txBody>
+      </p:sp>
+      <p:sp>
+        <p:nvSpPr>
+          <p:cNvPr id="4" name="Slide Number Placeholder 3"/>
+          <p:cNvSpPr>
+            <a:spLocks noGrp="1"/>
+          </p:cNvSpPr>
+          <p:nvPr>
+            <p:ph type="sldNum" idx="5" sz="quarter"/>
+          </p:nvPr>
+        </p:nvSpPr>
+        <p:spPr/>
+      </p:sp>
+    </p:spTree>
+  </p:cSld>
+  <p:clrMapOvr>
+    <a:masterClrMapping/>
+  </p:clrMapOvr>
+</p:notes>
+</file>
+
+<file path=ppt/notesSlides/notesSlide5.xml><?xml version="1.0" encoding="utf-8"?>
+<p:notes xmlns:a="http://schemas.openxmlformats.org/drawingml/2006/main" xmlns:p="http://schemas.openxmlformats.org/presentationml/2006/main" xmlns:r="http://schemas.openxmlformats.org/officeDocument/2006/relationships">
+  <p:cSld>
+    <p:spTree>
+      <p:nvGrpSpPr>
+        <p:cNvPr id="1" name=""/>
+        <p:cNvGrpSpPr/>
+        <p:nvPr/>
+      </p:nvGrpSpPr>
+      <p:grpSpPr>
+        <a:xfrm>
+          <a:off x="0" y="0"/>
+          <a:ext cx="0" cy="0"/>
+          <a:chOff x="0" y="0"/>
+          <a:chExt cx="0" cy="0"/>
+        </a:xfrm>
+      </p:grpSpPr>
+      <p:sp>
+        <p:nvSpPr>
+          <p:cNvPr id="2" name="Slide Image Placeholder 1"/>
+          <p:cNvSpPr>
+            <a:spLocks noGrp="1"/>
+          </p:cNvSpPr>
+          <p:nvPr>
+            <p:ph type="sldImg" idx="2"/>
+          </p:nvPr>
+        </p:nvSpPr>
+        <p:spPr/>
+      </p:sp>
+      <p:sp>
+        <p:nvSpPr>
+          <p:cNvPr id="3" name="Notes Placeholder 2"/>
+          <p:cNvSpPr>
+            <a:spLocks noGrp="1"/>
+          </p:cNvSpPr>
+          <p:nvPr>
+            <p:ph type="body" idx="3" sz="quarter"/>
+          </p:nvPr>
+        </p:nvSpPr>
+        <p:spPr/>
+        <p:txBody>
+          <a:bodyPr/>
+          <a:lstStyle/>
+          <a:p>
+            <a:r>
+              <a:rPr sz="1300"/>
+              <a:t>ИНИЦИАЛИЗАЦИЯ - ПОВТОРНА И ВАЛИДАЦИЯ (3 мин.)</a:t>
+            </a:r>
+          </a:p>
+          <a:p>
+            <a:r>
+              <a:rPr sz="1300"/>
+              <a:t>Обяснете двете точки:</a:t>
+            </a:r>
+          </a:p>
+          <a:p>
+            <a:r>
+              <a:rPr sz="1300"/>
+              <a:t>  1. Повторна инициализация: при многократно изпълнение на цикъл - инициализацията трябва да е ВЪТРЕ.</a:t>
+            </a:r>
+          </a:p>
+          <a:p>
+            <a:r>
+              <a:rPr sz="1300"/>
+              <a:t>  2. Валидация: int.TryParse вместо int.Parse.</a:t>
+            </a:r>
+          </a:p>
+          <a:p>
+            <a:r>
+              <a:rPr sz="1300"/>
+              <a:t>Задайте: "Каква е разликата между Parse и TryParse?"</a:t>
+            </a:r>
+          </a:p>
+          <a:p>
+            <a:r>
+              <a:rPr sz="1300"/>
+              <a:t>Отговор: Parse хвърля изключение при грешен вход; TryParse връща bool и не хвърля.</a:t>
+            </a:r>
+          </a:p>
+          <a:p>
+            <a:r>
+              <a:rPr sz="1300"/>
+              <a:t>Практика: "При четене от конзола - ВИНАГИ ползвайте TryParse."</a:t>
+            </a:r>
+          </a:p>
+        </p:txBody>
+      </p:sp>
+      <p:sp>
+        <p:nvSpPr>
+          <p:cNvPr id="4" name="Slide Number Placeholder 3"/>
+          <p:cNvSpPr>
+            <a:spLocks noGrp="1"/>
+          </p:cNvSpPr>
+          <p:nvPr>
+            <p:ph type="sldNum" idx="5" sz="quarter"/>
+          </p:nvPr>
+        </p:nvSpPr>
+        <p:spPr/>
+      </p:sp>
+    </p:spTree>
+  </p:cSld>
+  <p:clrMapOvr>
+    <a:masterClrMapping/>
+  </p:clrMapOvr>
+</p:notes>
+</file>
+
+<file path=ppt/notesSlides/notesSlide6.xml><?xml version="1.0" encoding="utf-8"?>
+<p:notes xmlns:a="http://schemas.openxmlformats.org/drawingml/2006/main" xmlns:p="http://schemas.openxmlformats.org/presentationml/2006/main" xmlns:r="http://schemas.openxmlformats.org/officeDocument/2006/relationships">
+  <p:cSld>
+    <p:spTree>
+      <p:nvGrpSpPr>
+        <p:cNvPr id="1" name=""/>
+        <p:cNvGrpSpPr/>
+        <p:nvPr/>
+      </p:nvGrpSpPr>
+      <p:grpSpPr>
+        <a:xfrm>
+          <a:off x="0" y="0"/>
+          <a:ext cx="0" cy="0"/>
+          <a:chOff x="0" y="0"/>
+          <a:chExt cx="0" cy="0"/>
+        </a:xfrm>
+      </p:grpSpPr>
+      <p:sp>
+        <p:nvSpPr>
+          <p:cNvPr id="2" name="Slide Image Placeholder 1"/>
+          <p:cNvSpPr>
+            <a:spLocks noGrp="1"/>
+          </p:cNvSpPr>
+          <p:nvPr>
+            <p:ph type="sldImg" idx="2"/>
+          </p:nvPr>
+        </p:nvSpPr>
+        <p:spPr/>
+      </p:sp>
+      <p:sp>
+        <p:nvSpPr>
+          <p:cNvPr id="3" name="Notes Placeholder 2"/>
+          <p:cNvSpPr>
+            <a:spLocks noGrp="1"/>
+          </p:cNvSpPr>
+          <p:nvPr>
+            <p:ph type="body" idx="3" sz="quarter"/>
+          </p:nvPr>
+        </p:nvSpPr>
+        <p:spPr/>
+        <p:txBody>
+          <a:bodyPr/>
+          <a:lstStyle/>
+          <a:p>
+            <a:r>
+              <a:rPr sz="1300"/>
+              <a:t>ОТЧАСТИ ИНИЦИАЛИЗИРАНИ ОБЕКТИ (3 мин.)</a:t>
+            </a:r>
+          </a:p>
+          <a:p>
+            <a:r>
+              <a:rPr sz="1300"/>
+              <a:t>Обяснете проблема: "Обект, в който не всички задължителни полета са зададени, е опасен."</a:t>
+            </a:r>
+          </a:p>
+          <a:p>
+            <a:r>
+              <a:rPr sz="1300"/>
+              <a:t>Покажете примера: Student без FacultyNumber - ако базата изисква това поле, ще получим грешка.</a:t>
+            </a:r>
+          </a:p>
+          <a:p>
+            <a:r>
+              <a:rPr sz="1300"/>
+              <a:t>Решение: конструкторът изисква задължителните параметри -&gt; невъзможно е да създадете невалиден обект.</a:t>
+            </a:r>
+          </a:p>
+          <a:p>
+            <a:r>
+              <a:rPr sz="1300"/>
+              <a:t>Акцент: "Правете невалидните обекти невъзможни за конструиране - не разчитайте на проверки след това."</a:t>
+            </a:r>
+          </a:p>
+          <a:p>
+            <a:r>
+              <a:rPr sz="1300"/>
+              <a:t>Свързване: "Ще видите това и в Design Patterns."</a:t>
+            </a:r>
+          </a:p>
+        </p:txBody>
+      </p:sp>
+      <p:sp>
+        <p:nvSpPr>
+          <p:cNvPr id="4" name="Slide Number Placeholder 3"/>
+          <p:cNvSpPr>
+            <a:spLocks noGrp="1"/>
+          </p:cNvSpPr>
+          <p:nvPr>
+            <p:ph type="sldNum" idx="5" sz="quarter"/>
+          </p:nvPr>
+        </p:nvSpPr>
+        <p:spPr/>
+      </p:sp>
+    </p:spTree>
+  </p:cSld>
+  <p:clrMapOvr>
+    <a:masterClrMapping/>
+  </p:clrMapOvr>
+</p:notes>
+</file>
+
+<file path=ppt/notesSlides/notesSlide7.xml><?xml version="1.0" encoding="utf-8"?>
+<p:notes xmlns:a="http://schemas.openxmlformats.org/drawingml/2006/main" xmlns:p="http://schemas.openxmlformats.org/presentationml/2006/main" xmlns:r="http://schemas.openxmlformats.org/officeDocument/2006/relationships">
+  <p:cSld>
+    <p:spTree>
+      <p:nvGrpSpPr>
+        <p:cNvPr id="1" name=""/>
+        <p:cNvGrpSpPr/>
+        <p:nvPr/>
+      </p:nvGrpSpPr>
+      <p:grpSpPr>
+        <a:xfrm>
+          <a:off x="0" y="0"/>
+          <a:ext cx="0" cy="0"/>
+          <a:chOff x="0" y="0"/>
+          <a:chExt cx="0" cy="0"/>
+        </a:xfrm>
+      </p:grpSpPr>
+      <p:sp>
+        <p:nvSpPr>
+          <p:cNvPr id="2" name="Slide Image Placeholder 1"/>
+          <p:cNvSpPr>
+            <a:spLocks noGrp="1"/>
+          </p:cNvSpPr>
+          <p:nvPr>
+            <p:ph type="sldImg" idx="2"/>
+          </p:nvPr>
+        </p:nvSpPr>
+        <p:spPr/>
+      </p:sp>
+      <p:sp>
+        <p:nvSpPr>
+          <p:cNvPr id="3" name="Notes Placeholder 2"/>
+          <p:cNvSpPr>
+            <a:spLocks noGrp="1"/>
+          </p:cNvSpPr>
+          <p:nvPr>
+            <p:ph type="body" idx="3" sz="quarter"/>
+          </p:nvPr>
+        </p:nvSpPr>
+        <p:spPr/>
+        <p:txBody>
+          <a:bodyPr/>
+          <a:lstStyle/>
+          <a:p>
+            <a:r>
+              <a:rPr sz="1300"/>
+              <a:t>СЪВЕТИ ЗА ПОЛЗВАНЕ НА ПРОМЕНЛИВИ (3 мин.)</a:t>
+            </a:r>
+          </a:p>
+          <a:p>
+            <a:r>
+              <a:rPr sz="1300"/>
+              <a:t>Обяснете двете точки с примери:</a:t>
+            </a:r>
+          </a:p>
+          <a:p>
+            <a:r>
+              <a:rPr sz="1300"/>
+              <a:t>  1. Неизползвани променливи -&gt; компилаторът предупреждава -&gt; изтрийте ги.</a:t>
+            </a:r>
+          </a:p>
+          <a:p>
+            <a:r>
+              <a:rPr sz="1300"/>
+              <a:t>  2. Скрита цел: int mode = 1/2/3 - ЛОШО. Ползвайте enum ResourceAccessMode.</a:t>
+            </a:r>
+          </a:p>
+          <a:p>
+            <a:r>
+              <a:rPr sz="1300"/>
+              <a:t>Задайте: "Защо enum е по-добър от magic number за режим на достъп?"</a:t>
+            </a:r>
+          </a:p>
+          <a:p>
+            <a:r>
+              <a:rPr sz="1300"/>
+              <a:t>Отговор: четимост, IntelliSense, compile-time проверка, лесна промяна.</a:t>
+            </a:r>
+          </a:p>
+          <a:p>
+            <a:r>
+              <a:rPr sz="1300"/>
+              <a:t>Акцент: "Никога не кодирайте смисъл в числа. Дайте им имена."</a:t>
+            </a:r>
+          </a:p>
+        </p:txBody>
+      </p:sp>
+      <p:sp>
+        <p:nvSpPr>
+          <p:cNvPr id="4" name="Slide Number Placeholder 3"/>
+          <p:cNvSpPr>
+            <a:spLocks noGrp="1"/>
+          </p:cNvSpPr>
+          <p:nvPr>
+            <p:ph type="sldNum" idx="5" sz="quarter"/>
+          </p:nvPr>
+        </p:nvSpPr>
+        <p:spPr/>
+      </p:sp>
+    </p:spTree>
+  </p:cSld>
+  <p:clrMapOvr>
+    <a:masterClrMapping/>
+  </p:clrMapOvr>
+</p:notes>
+</file>
+
+<file path=ppt/notesSlides/notesSlide8.xml><?xml version="1.0" encoding="utf-8"?>
+<p:notes xmlns:a="http://schemas.openxmlformats.org/drawingml/2006/main" xmlns:p="http://schemas.openxmlformats.org/presentationml/2006/main" xmlns:r="http://schemas.openxmlformats.org/officeDocument/2006/relationships">
+  <p:cSld>
+    <p:spTree>
+      <p:nvGrpSpPr>
+        <p:cNvPr id="1" name=""/>
+        <p:cNvGrpSpPr/>
+        <p:nvPr/>
+      </p:nvGrpSpPr>
+      <p:grpSpPr>
+        <a:xfrm>
+          <a:off x="0" y="0"/>
+          <a:ext cx="0" cy="0"/>
+          <a:chOff x="0" y="0"/>
+          <a:chExt cx="0" cy="0"/>
+        </a:xfrm>
+      </p:grpSpPr>
+      <p:sp>
+        <p:nvSpPr>
+          <p:cNvPr id="2" name="Slide Image Placeholder 1"/>
+          <p:cNvSpPr>
+            <a:spLocks noGrp="1"/>
+          </p:cNvSpPr>
+          <p:nvPr>
+            <p:ph type="sldImg" idx="2"/>
+          </p:nvPr>
+        </p:nvSpPr>
+        <p:spPr/>
+      </p:sp>
+      <p:sp>
+        <p:nvSpPr>
+          <p:cNvPr id="3" name="Notes Placeholder 2"/>
+          <p:cNvSpPr>
+            <a:spLocks noGrp="1"/>
+          </p:cNvSpPr>
+          <p:nvPr>
+            <p:ph type="body" idx="3" sz="quarter"/>
+          </p:nvPr>
+        </p:nvSpPr>
+        <p:spPr/>
+        <p:txBody>
+          <a:bodyPr/>
+          <a:lstStyle/>
+          <a:p>
+            <a:r>
+              <a:rPr sz="1300"/>
+              <a:t>ВРЪЩАНЕ НА РЕЗУЛТАТ ОТ МЕТОД (3 мин.)</a:t>
+            </a:r>
+          </a:p>
+          <a:p>
+            <a:r>
+              <a:rPr sz="1300"/>
+              <a:t>Покажете двата варианта. Задайте: "Кой предпочитате? Защо?"</a:t>
+            </a:r>
+          </a:p>
+          <a:p>
+            <a:r>
+              <a:rPr sz="1300"/>
+              <a:t>Предимства на именуваната променлива:</a:t>
+            </a:r>
+          </a:p>
+          <a:p>
+            <a:r>
+              <a:rPr sz="1300"/>
+              <a:t>  1. Четимост: salary е по-ясно от сложния израз.</a:t>
+            </a:r>
+          </a:p>
+          <a:p>
+            <a:r>
+              <a:rPr sz="1300"/>
+              <a:t>  2. Дебъгване: можете да поставите breakpoint и да видите стойността.</a:t>
+            </a:r>
+          </a:p>
+          <a:p>
+            <a:r>
+              <a:rPr sz="1300"/>
+              <a:t>  3. Самодокументиращо се: int salary = days * rate - ясно какво е.</a:t>
+            </a:r>
+          </a:p>
+          <a:p>
+            <a:r>
+              <a:rPr sz="1300"/>
+              <a:t>Практика: "При сложен return израз - ВИНАГИ го разбивайте на именувана стъпка."</a:t>
+            </a:r>
+          </a:p>
+        </p:txBody>
+      </p:sp>
+      <p:sp>
+        <p:nvSpPr>
+          <p:cNvPr id="4" name="Slide Number Placeholder 3"/>
+          <p:cNvSpPr>
+            <a:spLocks noGrp="1"/>
+          </p:cNvSpPr>
+          <p:nvPr>
+            <p:ph type="sldNum" idx="5" sz="quarter"/>
+          </p:nvPr>
+        </p:nvSpPr>
+        <p:spPr/>
+      </p:sp>
+    </p:spTree>
+  </p:cSld>
+  <p:clrMapOvr>
+    <a:masterClrMapping/>
+  </p:clrMapOvr>
+</p:notes>
+</file>
+
+<file path=ppt/notesSlides/notesSlide9.xml><?xml version="1.0" encoding="utf-8"?>
+<p:notes xmlns:a="http://schemas.openxmlformats.org/drawingml/2006/main" xmlns:p="http://schemas.openxmlformats.org/presentationml/2006/main" xmlns:r="http://schemas.openxmlformats.org/officeDocument/2006/relationships">
+  <p:cSld>
+    <p:spTree>
+      <p:nvGrpSpPr>
+        <p:cNvPr id="1" name=""/>
+        <p:cNvGrpSpPr/>
+        <p:nvPr/>
+      </p:nvGrpSpPr>
+      <p:grpSpPr>
+        <a:xfrm>
+          <a:off x="0" y="0"/>
+          <a:ext cx="0" cy="0"/>
+          <a:chOff x="0" y="0"/>
+          <a:chExt cx="0" cy="0"/>
+        </a:xfrm>
+      </p:grpSpPr>
+      <p:sp>
+        <p:nvSpPr>
+          <p:cNvPr id="2" name="Slide Image Placeholder 1"/>
+          <p:cNvSpPr>
+            <a:spLocks noGrp="1"/>
+          </p:cNvSpPr>
+          <p:nvPr>
+            <p:ph type="sldImg" idx="2"/>
+          </p:nvPr>
+        </p:nvSpPr>
+        <p:spPr/>
+      </p:sp>
+      <p:sp>
+        <p:nvSpPr>
+          <p:cNvPr id="3" name="Notes Placeholder 2"/>
+          <p:cNvSpPr>
+            <a:spLocks noGrp="1"/>
+          </p:cNvSpPr>
+          <p:nvPr>
+            <p:ph type="body" idx="3" sz="quarter"/>
+          </p:nvPr>
+        </p:nvSpPr>
+        <p:spPr/>
+        <p:txBody>
+          <a:bodyPr/>
+          <a:lstStyle/>
+          <a:p>
+            <a:r>
+              <a:rPr sz="1300"/>
+              <a:t>ОБХВАТ И ВИДИМОСТ (3 мин.)</a:t>
+            </a:r>
+          </a:p>
+          <a:p>
+            <a:r>
+              <a:rPr sz="1300"/>
+              <a:t>Обяснете принципа: "Минимален обхват = минимална зависимост."</a:t>
+            </a:r>
+          </a:p>
+          <a:p>
+            <a:r>
+              <a:rPr sz="1300"/>
+              <a:t>Конкретно:</a:t>
+            </a:r>
+          </a:p>
+          <a:p>
+            <a:r>
+              <a:rPr sz="1300"/>
+              <a:t>  - public поле -&gt; достъпно отвсякъде -&gt; трудно да следите кой го променя.</a:t>
+            </a:r>
+          </a:p>
+          <a:p>
+            <a:r>
+              <a:rPr sz="1300"/>
+              <a:t>  - private поле + свойство -&gt; контролиран достъп.</a:t>
+            </a:r>
+          </a:p>
+          <a:p>
+            <a:r>
+              <a:rPr sz="1300"/>
+              <a:t>Задайте: "Защо избягваме public полета освен readonly/const?"</a:t>
+            </a:r>
+          </a:p>
+          <a:p>
+            <a:r>
+              <a:rPr sz="1300"/>
+              <a:t>Отговор: не можем да контролираме кой ги променя и кога - води до трудно открити грешки.</a:t>
+            </a:r>
+          </a:p>
+          <a:p>
+            <a:r>
+              <a:rPr sz="1300"/>
+              <a:t>Акцент: "Принципът 'need to know' - давайте достъп само на тези, на които е нужен."</a:t>
+            </a:r>
+          </a:p>
+        </p:txBody>
+      </p:sp>
+      <p:sp>
+        <p:nvSpPr>
+          <p:cNvPr id="4" name="Slide Number Placeholder 3"/>
+          <p:cNvSpPr>
+            <a:spLocks noGrp="1"/>
+          </p:cNvSpPr>
+          <p:nvPr>
+            <p:ph type="sldNum" idx="5" sz="quarter"/>
+          </p:nvPr>
+        </p:nvSpPr>
+        <p:spPr/>
+      </p:sp>
+    </p:spTree>
   </p:cSld>
   <p:clrMapOvr>
     <a:masterClrMapping/>
